--- a/AI_Age_Estimation_Presentation.pptx
+++ b/AI_Age_Estimation_Presentation.pptx
@@ -14,11 +14,11 @@
     <p:sldId id="262" r:id="rId8"/>
     <p:sldId id="263" r:id="rId9"/>
     <p:sldId id="264" r:id="rId10"/>
-    <p:sldId id="266" r:id="rId11"/>
-    <p:sldId id="267" r:id="rId12"/>
-    <p:sldId id="268" r:id="rId13"/>
-    <p:sldId id="269" r:id="rId14"/>
-    <p:sldId id="265" r:id="rId15"/>
+    <p:sldId id="266" r:id="rId16"/>
+    <p:sldId id="267" r:id="rId17"/>
+    <p:sldId id="268" r:id="rId18"/>
+    <p:sldId id="269" r:id="rId19"/>
+    <p:sldId id="265" r:id="rId11"/>
   </p:sldIdLst>
   <p:sldSz cx="12192000" cy="6858000"/>
   <p:notesSz cx="6858000" cy="9144000"/>
@@ -315,7 +315,7 @@
           <a:p>
             <a:fld id="{5BCAD085-E8A6-8845-BD4E-CB4CCA059FC4}" type="datetimeFigureOut">
               <a:rPr lang="en-US" smtClean="0"/>
-              <a:t>8/28/2026</a:t>
+              <a:t>8/26/2026</a:t>
             </a:fld>
             <a:endParaRPr lang="en-US"/>
           </a:p>
@@ -483,7 +483,7 @@
           <a:p>
             <a:fld id="{5BCAD085-E8A6-8845-BD4E-CB4CCA059FC4}" type="datetimeFigureOut">
               <a:rPr lang="en-US" smtClean="0"/>
-              <a:t>8/28/2026</a:t>
+              <a:t>8/26/2026</a:t>
             </a:fld>
             <a:endParaRPr lang="en-US"/>
           </a:p>
@@ -661,7 +661,7 @@
           <a:p>
             <a:fld id="{5BCAD085-E8A6-8845-BD4E-CB4CCA059FC4}" type="datetimeFigureOut">
               <a:rPr lang="en-US" smtClean="0"/>
-              <a:t>8/28/2026</a:t>
+              <a:t>8/26/2026</a:t>
             </a:fld>
             <a:endParaRPr lang="en-US"/>
           </a:p>
@@ -829,7 +829,7 @@
           <a:p>
             <a:fld id="{5BCAD085-E8A6-8845-BD4E-CB4CCA059FC4}" type="datetimeFigureOut">
               <a:rPr lang="en-US" smtClean="0"/>
-              <a:t>8/28/2026</a:t>
+              <a:t>8/26/2026</a:t>
             </a:fld>
             <a:endParaRPr lang="en-US"/>
           </a:p>
@@ -1074,7 +1074,7 @@
           <a:p>
             <a:fld id="{5BCAD085-E8A6-8845-BD4E-CB4CCA059FC4}" type="datetimeFigureOut">
               <a:rPr lang="en-US" smtClean="0"/>
-              <a:t>8/28/2026</a:t>
+              <a:t>8/26/2026</a:t>
             </a:fld>
             <a:endParaRPr lang="en-US"/>
           </a:p>
@@ -1359,7 +1359,7 @@
           <a:p>
             <a:fld id="{5BCAD085-E8A6-8845-BD4E-CB4CCA059FC4}" type="datetimeFigureOut">
               <a:rPr lang="en-US" smtClean="0"/>
-              <a:t>8/28/2026</a:t>
+              <a:t>8/26/2026</a:t>
             </a:fld>
             <a:endParaRPr lang="en-US"/>
           </a:p>
@@ -1778,7 +1778,7 @@
           <a:p>
             <a:fld id="{5BCAD085-E8A6-8845-BD4E-CB4CCA059FC4}" type="datetimeFigureOut">
               <a:rPr lang="en-US" smtClean="0"/>
-              <a:t>8/28/2026</a:t>
+              <a:t>8/26/2026</a:t>
             </a:fld>
             <a:endParaRPr lang="en-US"/>
           </a:p>
@@ -1895,7 +1895,7 @@
           <a:p>
             <a:fld id="{5BCAD085-E8A6-8845-BD4E-CB4CCA059FC4}" type="datetimeFigureOut">
               <a:rPr lang="en-US" smtClean="0"/>
-              <a:t>8/28/2026</a:t>
+              <a:t>8/26/2026</a:t>
             </a:fld>
             <a:endParaRPr lang="en-US"/>
           </a:p>
@@ -1990,7 +1990,7 @@
           <a:p>
             <a:fld id="{5BCAD085-E8A6-8845-BD4E-CB4CCA059FC4}" type="datetimeFigureOut">
               <a:rPr lang="en-US" smtClean="0"/>
-              <a:t>8/28/2026</a:t>
+              <a:t>8/26/2026</a:t>
             </a:fld>
             <a:endParaRPr lang="en-US"/>
           </a:p>
@@ -2265,7 +2265,7 @@
           <a:p>
             <a:fld id="{5BCAD085-E8A6-8845-BD4E-CB4CCA059FC4}" type="datetimeFigureOut">
               <a:rPr lang="en-US" smtClean="0"/>
-              <a:t>8/28/2026</a:t>
+              <a:t>8/26/2026</a:t>
             </a:fld>
             <a:endParaRPr lang="en-US"/>
           </a:p>
@@ -2517,7 +2517,7 @@
           <a:p>
             <a:fld id="{5BCAD085-E8A6-8845-BD4E-CB4CCA059FC4}" type="datetimeFigureOut">
               <a:rPr lang="en-US" smtClean="0"/>
-              <a:t>8/28/2026</a:t>
+              <a:t>8/26/2026</a:t>
             </a:fld>
             <a:endParaRPr lang="en-US"/>
           </a:p>
@@ -2728,7 +2728,7 @@
           <a:p>
             <a:fld id="{5BCAD085-E8A6-8845-BD4E-CB4CCA059FC4}" type="datetimeFigureOut">
               <a:rPr lang="en-US" smtClean="0"/>
-              <a:t>8/28/2026</a:t>
+              <a:t>8/26/2026</a:t>
             </a:fld>
             <a:endParaRPr lang="en-US"/>
           </a:p>
@@ -3369,7 +3369,7 @@
         <p:spPr>
           <a:xfrm>
             <a:off x="1371600" y="5257800"/>
-            <a:ext cx="7717177" cy="800219"/>
+            <a:ext cx="9418320" cy="822960"/>
           </a:xfrm>
           <a:prstGeom prst="rect">
             <a:avLst/>
@@ -3391,95 +3391,16 @@
               </a:defRPr>
             </a:pPr>
             <a:r>
-              <a:rPr dirty="0"/>
-              <a:t>✦ 汇报核心模块：1. </a:t>
-            </a:r>
-            <a:r>
-              <a:rPr dirty="0" err="1"/>
-              <a:t>系统运行机理与数据流全景图</a:t>
-            </a:r>
-            <a:r>
-              <a:rPr dirty="0"/>
-              <a:t>  |  2. </a:t>
-            </a:r>
-            <a:r>
-              <a:rPr dirty="0" err="1"/>
-              <a:t>真实人物网页运行实测截图</a:t>
-            </a:r>
-            <a:r>
-              <a:rPr dirty="0"/>
-              <a:t> (</a:t>
-            </a:r>
-            <a:r>
-              <a:rPr dirty="0" err="1"/>
-              <a:t>特朗普</a:t>
-            </a:r>
-            <a:r>
-              <a:rPr dirty="0"/>
-              <a:t>/</a:t>
-            </a:r>
-            <a:r>
-              <a:rPr dirty="0" err="1"/>
-              <a:t>小李子</a:t>
-            </a:r>
-            <a:r>
-              <a:rPr dirty="0"/>
-              <a:t>/Sam Altman</a:t>
-            </a:r>
-            <a:r>
-              <a:rPr lang="zh-CN" altLang="en-US" dirty="0"/>
-              <a:t>）</a:t>
-            </a:r>
-            <a:endParaRPr lang="en-US" dirty="0"/>
-          </a:p>
-          <a:p>
-            <a:pPr>
-              <a:defRPr sz="1150">
-                <a:solidFill>
-                  <a:srgbClr val="FFFFFF"/>
-                </a:solidFill>
-                <a:latin typeface="Microsoft YaHei"/>
-              </a:defRPr>
-            </a:pPr>
-            <a:r>
-              <a:rPr dirty="0"/>
-              <a:t>3. CNN </a:t>
-            </a:r>
-            <a:r>
-              <a:rPr dirty="0" err="1"/>
-              <a:t>直接回归算法数学建模</a:t>
-            </a:r>
-            <a:r>
-              <a:rPr dirty="0"/>
-              <a:t>  |  4. </a:t>
-            </a:r>
-            <a:r>
-              <a:rPr dirty="0" err="1"/>
-              <a:t>生理衰老特征关注度</a:t>
-            </a:r>
-            <a:r>
-              <a:rPr dirty="0"/>
-              <a:t> Grad-CAM </a:t>
-            </a:r>
-            <a:r>
-              <a:rPr dirty="0" err="1"/>
-              <a:t>热力分析</a:t>
-            </a:r>
-            <a:r>
-              <a:rPr dirty="0"/>
-              <a:t>  |  5. </a:t>
-            </a:r>
-            <a:r>
-              <a:rPr dirty="0" err="1"/>
-              <a:t>鲁棒性与缺陷真实评析</a:t>
-            </a:r>
-            <a:br>
-              <a:rPr dirty="0"/>
-            </a:br>
-            <a:br>
-              <a:rPr dirty="0"/>
-            </a:br>
-            <a:endParaRPr dirty="0"/>
+              <a:t>✦ 汇报核心模块：1. 系统运行机理与数据流全景图  |  2. 真实人物网页运行实测截图 (特朗普/小李子/Sam Altman)3. CNN 直接回归算法数学建模  |  4. 生理衰老特征关注度 Grad-CAM 热力分析  |  5. 鲁棒性与缺陷真实评析</a:t>
+            </a:r>
+            <a:br/>
+            <a:r>
+              <a:t/>
+            </a:r>
+            <a:br/>
+            <a:r>
+              <a:t/>
+            </a:r>
           </a:p>
         </p:txBody>
       </p:sp>
@@ -3492,7 +3413,7 @@
 </file>
 
 <file path=ppt/slides/slide10.xml><?xml version="1.0" encoding="utf-8"?>
-<p:sld xmlns:a="http://schemas.openxmlformats.org/drawingml/2006/main" xmlns:r="http://schemas.openxmlformats.org/officeDocument/2006/relationships" xmlns:p="http://schemas.openxmlformats.org/presentationml/2006/main">
+<p:sld xmlns:a="http://schemas.openxmlformats.org/drawingml/2006/main" xmlns:p="http://schemas.openxmlformats.org/presentationml/2006/main" xmlns:r="http://schemas.openxmlformats.org/officeDocument/2006/relationships">
   <p:cSld>
     <p:spTree>
       <p:nvGrpSpPr>
@@ -3500,14 +3421,7 @@
         <p:cNvGrpSpPr/>
         <p:nvPr/>
       </p:nvGrpSpPr>
-      <p:grpSpPr>
-        <a:xfrm>
-          <a:off x="0" y="0"/>
-          <a:ext cx="0" cy="0"/>
-          <a:chOff x="0" y="0"/>
-          <a:chExt cx="0" cy="0"/>
-        </a:xfrm>
-      </p:grpSpPr>
+      <p:grpSpPr/>
       <p:sp>
         <p:nvSpPr>
           <p:cNvPr id="2" name="Rounded Rectangle 1"/>
@@ -3544,7 +3458,7 @@
           </a:fontRef>
         </p:style>
         <p:txBody>
-          <a:bodyPr lIns="137160" tIns="27432" rtlCol="0" anchor="ctr"/>
+          <a:bodyPr rtlCol="0" anchor="ctr" lIns="137160" tIns="27432"/>
           <a:lstStyle/>
           <a:p>
             <a:pPr algn="ctr"/>
@@ -3611,27 +3525,9 @@
                 <a:tableStyleId>{5C22544A-7EE6-4342-B048-85BDC9FD1C3A}</a:tableStyleId>
               </a:tblPr>
               <a:tblGrid>
-                <a:gridCol w="2743200">
-                  <a:extLst>
-                    <a:ext uri="{9D8B030D-6E8A-4147-A177-3AD203B41FA5}">
-                      <a16:colId xmlns:a16="http://schemas.microsoft.com/office/drawing/2014/main" val="20000"/>
-                    </a:ext>
-                  </a:extLst>
-                </a:gridCol>
-                <a:gridCol w="2103120">
-                  <a:extLst>
-                    <a:ext uri="{9D8B030D-6E8A-4147-A177-3AD203B41FA5}">
-                      <a16:colId xmlns:a16="http://schemas.microsoft.com/office/drawing/2014/main" val="20001"/>
-                    </a:ext>
-                  </a:extLst>
-                </a:gridCol>
-                <a:gridCol w="2103120">
-                  <a:extLst>
-                    <a:ext uri="{9D8B030D-6E8A-4147-A177-3AD203B41FA5}">
-                      <a16:colId xmlns:a16="http://schemas.microsoft.com/office/drawing/2014/main" val="20002"/>
-                    </a:ext>
-                  </a:extLst>
-                </a:gridCol>
+                <a:gridCol w="2743200"/>
+                <a:gridCol w="2103120"/>
+                <a:gridCol w="2103120"/>
               </a:tblGrid>
               <a:tr h="502920">
                 <a:tc>
@@ -3700,11 +3596,6 @@
                     </a:solidFill>
                   </a:tcPr>
                 </a:tc>
-                <a:extLst>
-                  <a:ext uri="{0D108BD9-81ED-4DB2-BD59-A6C34878D82A}">
-                    <a16:rowId xmlns:a16="http://schemas.microsoft.com/office/drawing/2014/main" val="10000"/>
-                  </a:ext>
-                </a:extLst>
               </a:tr>
               <a:tr h="502920">
                 <a:tc>
@@ -3773,11 +3664,6 @@
                     </a:solidFill>
                   </a:tcPr>
                 </a:tc>
-                <a:extLst>
-                  <a:ext uri="{0D108BD9-81ED-4DB2-BD59-A6C34878D82A}">
-                    <a16:rowId xmlns:a16="http://schemas.microsoft.com/office/drawing/2014/main" val="10001"/>
-                  </a:ext>
-                </a:extLst>
               </a:tr>
               <a:tr h="502920">
                 <a:tc>
@@ -3846,11 +3732,6 @@
                     </a:solidFill>
                   </a:tcPr>
                 </a:tc>
-                <a:extLst>
-                  <a:ext uri="{0D108BD9-81ED-4DB2-BD59-A6C34878D82A}">
-                    <a16:rowId xmlns:a16="http://schemas.microsoft.com/office/drawing/2014/main" val="10002"/>
-                  </a:ext>
-                </a:extLst>
               </a:tr>
               <a:tr h="502920">
                 <a:tc>
@@ -3919,11 +3800,6 @@
                     </a:solidFill>
                   </a:tcPr>
                 </a:tc>
-                <a:extLst>
-                  <a:ext uri="{0D108BD9-81ED-4DB2-BD59-A6C34878D82A}">
-                    <a16:rowId xmlns:a16="http://schemas.microsoft.com/office/drawing/2014/main" val="10003"/>
-                  </a:ext>
-                </a:extLst>
               </a:tr>
               <a:tr h="502920">
                 <a:tc>
@@ -3992,11 +3868,6 @@
                     </a:solidFill>
                   </a:tcPr>
                 </a:tc>
-                <a:extLst>
-                  <a:ext uri="{0D108BD9-81ED-4DB2-BD59-A6C34878D82A}">
-                    <a16:rowId xmlns:a16="http://schemas.microsoft.com/office/drawing/2014/main" val="10004"/>
-                  </a:ext>
-                </a:extLst>
               </a:tr>
               <a:tr h="502920">
                 <a:tc>
@@ -4065,11 +3936,6 @@
                     </a:solidFill>
                   </a:tcPr>
                 </a:tc>
-                <a:extLst>
-                  <a:ext uri="{0D108BD9-81ED-4DB2-BD59-A6C34878D82A}">
-                    <a16:rowId xmlns:a16="http://schemas.microsoft.com/office/drawing/2014/main" val="10005"/>
-                  </a:ext>
-                </a:extLst>
               </a:tr>
             </a:tbl>
           </a:graphicData>
@@ -4111,7 +3977,7 @@
           </a:fontRef>
         </p:style>
         <p:txBody>
-          <a:bodyPr wrap="square" lIns="164592" tIns="109728" rIns="137160" bIns="91440" rtlCol="0" anchor="t"/>
+          <a:bodyPr rtlCol="0" anchor="t" wrap="square" lIns="164592" rIns="137160" tIns="109728" bIns="91440"/>
           <a:lstStyle/>
           <a:p>
             <a:pPr algn="ctr"/>
@@ -4210,7 +4076,7 @@
 </file>
 
 <file path=ppt/slides/slide11.xml><?xml version="1.0" encoding="utf-8"?>
-<p:sld xmlns:a="http://schemas.openxmlformats.org/drawingml/2006/main" xmlns:r="http://schemas.openxmlformats.org/officeDocument/2006/relationships" xmlns:p="http://schemas.openxmlformats.org/presentationml/2006/main">
+<p:sld xmlns:a="http://schemas.openxmlformats.org/drawingml/2006/main" xmlns:p="http://schemas.openxmlformats.org/presentationml/2006/main" xmlns:r="http://schemas.openxmlformats.org/officeDocument/2006/relationships">
   <p:cSld>
     <p:spTree>
       <p:nvGrpSpPr>
@@ -4218,14 +4084,7 @@
         <p:cNvGrpSpPr/>
         <p:nvPr/>
       </p:nvGrpSpPr>
-      <p:grpSpPr>
-        <a:xfrm>
-          <a:off x="0" y="0"/>
-          <a:ext cx="0" cy="0"/>
-          <a:chOff x="0" y="0"/>
-          <a:chExt cx="0" cy="0"/>
-        </a:xfrm>
-      </p:grpSpPr>
+      <p:grpSpPr/>
       <p:sp>
         <p:nvSpPr>
           <p:cNvPr id="2" name="Rounded Rectangle 1"/>
@@ -4262,7 +4121,7 @@
           </a:fontRef>
         </p:style>
         <p:txBody>
-          <a:bodyPr lIns="137160" tIns="27432" rtlCol="0" anchor="ctr"/>
+          <a:bodyPr rtlCol="0" anchor="ctr" lIns="137160" tIns="27432"/>
           <a:lstStyle/>
           <a:p>
             <a:pPr algn="ctr"/>
@@ -4346,7 +4205,7 @@
           </a:fontRef>
         </p:style>
         <p:txBody>
-          <a:bodyPr wrap="square" lIns="164592" tIns="109728" rIns="137160" bIns="91440" rtlCol="0" anchor="t"/>
+          <a:bodyPr rtlCol="0" anchor="t" wrap="square" lIns="164592" rIns="137160" tIns="109728" bIns="91440"/>
           <a:lstStyle/>
           <a:p>
             <a:pPr algn="ctr"/>
@@ -4427,7 +4286,7 @@
           </a:fontRef>
         </p:style>
         <p:txBody>
-          <a:bodyPr wrap="square" lIns="164592" tIns="109728" rIns="137160" bIns="91440" rtlCol="0" anchor="t"/>
+          <a:bodyPr rtlCol="0" anchor="t" wrap="square" lIns="164592" rIns="137160" tIns="109728" bIns="91440"/>
           <a:lstStyle/>
           <a:p>
             <a:pPr algn="ctr"/>
@@ -4508,7 +4367,7 @@
           </a:fontRef>
         </p:style>
         <p:txBody>
-          <a:bodyPr wrap="square" lIns="164592" tIns="109728" rIns="137160" bIns="91440" rtlCol="0" anchor="t"/>
+          <a:bodyPr rtlCol="0" anchor="t" wrap="square" lIns="164592" rIns="137160" tIns="109728" bIns="91440"/>
           <a:lstStyle/>
           <a:p>
             <a:pPr algn="ctr"/>
@@ -4589,7 +4448,7 @@
           </a:fontRef>
         </p:style>
         <p:txBody>
-          <a:bodyPr wrap="square" lIns="164592" tIns="109728" rIns="137160" bIns="91440" rtlCol="0" anchor="t"/>
+          <a:bodyPr rtlCol="0" anchor="t" wrap="square" lIns="164592" rIns="137160" tIns="109728" bIns="91440"/>
           <a:lstStyle/>
           <a:p>
             <a:pPr algn="ctr"/>
@@ -4643,7 +4502,7 @@
 </file>
 
 <file path=ppt/slides/slide12.xml><?xml version="1.0" encoding="utf-8"?>
-<p:sld xmlns:a="http://schemas.openxmlformats.org/drawingml/2006/main" xmlns:r="http://schemas.openxmlformats.org/officeDocument/2006/relationships" xmlns:p="http://schemas.openxmlformats.org/presentationml/2006/main">
+<p:sld xmlns:a="http://schemas.openxmlformats.org/drawingml/2006/main" xmlns:p="http://schemas.openxmlformats.org/presentationml/2006/main" xmlns:r="http://schemas.openxmlformats.org/officeDocument/2006/relationships">
   <p:cSld>
     <p:spTree>
       <p:nvGrpSpPr>
@@ -4651,14 +4510,7 @@
         <p:cNvGrpSpPr/>
         <p:nvPr/>
       </p:nvGrpSpPr>
-      <p:grpSpPr>
-        <a:xfrm>
-          <a:off x="0" y="0"/>
-          <a:ext cx="0" cy="0"/>
-          <a:chOff x="0" y="0"/>
-          <a:chExt cx="0" cy="0"/>
-        </a:xfrm>
-      </p:grpSpPr>
+      <p:grpSpPr/>
       <p:sp>
         <p:nvSpPr>
           <p:cNvPr id="2" name="Rounded Rectangle 1"/>
@@ -4695,7 +4547,7 @@
           </a:fontRef>
         </p:style>
         <p:txBody>
-          <a:bodyPr lIns="137160" tIns="27432" rtlCol="0" anchor="ctr"/>
+          <a:bodyPr rtlCol="0" anchor="ctr" lIns="137160" tIns="27432"/>
           <a:lstStyle/>
           <a:p>
             <a:pPr algn="ctr"/>
@@ -4779,7 +4631,7 @@
           </a:fontRef>
         </p:style>
         <p:txBody>
-          <a:bodyPr wrap="square" lIns="164592" tIns="109728" rIns="137160" bIns="91440" rtlCol="0" anchor="t"/>
+          <a:bodyPr rtlCol="0" anchor="t" wrap="square" lIns="164592" rIns="137160" tIns="109728" bIns="91440"/>
           <a:lstStyle/>
           <a:p>
             <a:pPr algn="ctr"/>
@@ -4875,7 +4727,7 @@
           </a:fontRef>
         </p:style>
         <p:txBody>
-          <a:bodyPr wrap="square" lIns="164592" tIns="109728" rIns="137160" bIns="91440" rtlCol="0" anchor="t"/>
+          <a:bodyPr rtlCol="0" anchor="t" wrap="square" lIns="164592" rIns="137160" tIns="109728" bIns="91440"/>
           <a:lstStyle/>
           <a:p>
             <a:pPr algn="ctr"/>
@@ -4971,7 +4823,7 @@
           </a:fontRef>
         </p:style>
         <p:txBody>
-          <a:bodyPr wrap="square" lIns="164592" tIns="109728" rIns="137160" bIns="91440" rtlCol="0" anchor="t"/>
+          <a:bodyPr rtlCol="0" anchor="t" wrap="square" lIns="164592" rIns="137160" tIns="109728" bIns="91440"/>
           <a:lstStyle/>
           <a:p>
             <a:pPr algn="ctr"/>
@@ -5052,7 +4904,7 @@
           </a:fontRef>
         </p:style>
         <p:txBody>
-          <a:bodyPr wrap="square" lIns="164592" tIns="109728" rIns="137160" bIns="91440" rtlCol="0" anchor="t"/>
+          <a:bodyPr rtlCol="0" anchor="t" wrap="square" lIns="164592" rIns="137160" tIns="109728" bIns="91440"/>
           <a:lstStyle/>
           <a:p>
             <a:pPr algn="ctr"/>
@@ -5121,7 +4973,7 @@
 </file>
 
 <file path=ppt/slides/slide13.xml><?xml version="1.0" encoding="utf-8"?>
-<p:sld xmlns:a="http://schemas.openxmlformats.org/drawingml/2006/main" xmlns:r="http://schemas.openxmlformats.org/officeDocument/2006/relationships" xmlns:p="http://schemas.openxmlformats.org/presentationml/2006/main">
+<p:sld xmlns:a="http://schemas.openxmlformats.org/drawingml/2006/main" xmlns:p="http://schemas.openxmlformats.org/presentationml/2006/main" xmlns:r="http://schemas.openxmlformats.org/officeDocument/2006/relationships">
   <p:cSld>
     <p:spTree>
       <p:nvGrpSpPr>
@@ -5129,14 +4981,7 @@
         <p:cNvGrpSpPr/>
         <p:nvPr/>
       </p:nvGrpSpPr>
-      <p:grpSpPr>
-        <a:xfrm>
-          <a:off x="0" y="0"/>
-          <a:ext cx="0" cy="0"/>
-          <a:chOff x="0" y="0"/>
-          <a:chExt cx="0" cy="0"/>
-        </a:xfrm>
-      </p:grpSpPr>
+      <p:grpSpPr/>
       <p:sp>
         <p:nvSpPr>
           <p:cNvPr id="2" name="Rounded Rectangle 1"/>
@@ -5173,7 +5018,7 @@
           </a:fontRef>
         </p:style>
         <p:txBody>
-          <a:bodyPr lIns="137160" tIns="27432" rtlCol="0" anchor="ctr"/>
+          <a:bodyPr rtlCol="0" anchor="ctr" lIns="137160" tIns="27432"/>
           <a:lstStyle/>
           <a:p>
             <a:pPr algn="ctr"/>
@@ -5257,7 +5102,7 @@
           </a:fontRef>
         </p:style>
         <p:txBody>
-          <a:bodyPr wrap="square" lIns="164592" tIns="109728" rIns="137160" bIns="91440" rtlCol="0" anchor="t"/>
+          <a:bodyPr rtlCol="0" anchor="t" wrap="square" lIns="164592" rIns="137160" tIns="109728" bIns="91440"/>
           <a:lstStyle/>
           <a:p>
             <a:pPr algn="ctr"/>
@@ -5338,7 +5183,7 @@
           </a:fontRef>
         </p:style>
         <p:txBody>
-          <a:bodyPr wrap="square" lIns="164592" tIns="109728" rIns="137160" bIns="91440" rtlCol="0" anchor="t"/>
+          <a:bodyPr rtlCol="0" anchor="t" wrap="square" lIns="164592" rIns="137160" tIns="109728" bIns="91440"/>
           <a:lstStyle/>
           <a:p>
             <a:pPr algn="ctr"/>
@@ -5419,7 +5264,7 @@
           </a:fontRef>
         </p:style>
         <p:txBody>
-          <a:bodyPr wrap="square" lIns="164592" tIns="109728" rIns="137160" bIns="91440" rtlCol="0" anchor="t"/>
+          <a:bodyPr rtlCol="0" anchor="t" wrap="square" lIns="164592" rIns="137160" tIns="109728" bIns="91440"/>
           <a:lstStyle/>
           <a:p>
             <a:pPr algn="ctr"/>
@@ -5500,7 +5345,7 @@
           </a:fontRef>
         </p:style>
         <p:txBody>
-          <a:bodyPr wrap="square" lIns="164592" tIns="109728" rIns="137160" bIns="91440" rtlCol="0" anchor="t"/>
+          <a:bodyPr rtlCol="0" anchor="t" wrap="square" lIns="164592" rIns="137160" tIns="109728" bIns="91440"/>
           <a:lstStyle/>
           <a:p>
             <a:pPr algn="ctr"/>
@@ -5581,7 +5426,7 @@
           </a:fontRef>
         </p:style>
         <p:txBody>
-          <a:bodyPr wrap="square" lIns="164592" tIns="109728" rIns="137160" bIns="91440" rtlCol="0" anchor="t"/>
+          <a:bodyPr rtlCol="0" anchor="t" wrap="square" lIns="164592" rIns="137160" tIns="109728" bIns="91440"/>
           <a:lstStyle/>
           <a:p>
             <a:pPr algn="ctr"/>
@@ -7393,7 +7238,9 @@
               <a:t>• 在标准正脸测试集上 MAE ≈ 9.2 岁；主要误差来自 80 岁以上人群被系统性低估（如 105 岁照片被预测为 29 岁）。</a:t>
             </a:r>
             <a:br/>
-            <a:endParaRPr/>
+            <a:r>
+              <a:t/>
+            </a:r>
           </a:p>
         </p:txBody>
       </p:sp>
@@ -7724,7 +7571,9 @@
               <a:t>真实71岁 ➔ 预测63岁 (误差-8岁)模型对高龄人群系统性低估，与训练数据高龄样本少一致。</a:t>
             </a:r>
             <a:br/>
-            <a:endParaRPr/>
+            <a:r>
+              <a:t/>
+            </a:r>
           </a:p>
         </p:txBody>
       </p:sp>
@@ -7824,7 +7673,9 @@
               <a:t>真实35岁 ➔ 预测30岁 (误差-5岁)预测落在合理区间，误差在模型正常范围内。</a:t>
             </a:r>
             <a:br/>
-            <a:endParaRPr/>
+            <a:r>
+              <a:t/>
+            </a:r>
           </a:p>
         </p:txBody>
       </p:sp>
@@ -7924,7 +7775,9 @@
               <a:t>真实37岁 ➔ 预测34岁 (误差-3岁)中年样本预测较为稳定，误差在模型正常范围内。</a:t>
             </a:r>
             <a:br/>
-            <a:endParaRPr/>
+            <a:r>
+              <a:t/>
+            </a:r>
           </a:p>
         </p:txBody>
       </p:sp>
@@ -7937,7 +7790,7 @@
           <p:nvPr/>
         </p:nvPicPr>
         <p:blipFill>
-          <a:blip r:embed="rId2"/>
+          <a:blip r:embed="rId5"/>
           <a:stretch>
             <a:fillRect/>
           </a:stretch>
@@ -7961,7 +7814,7 @@
           <p:nvPr/>
         </p:nvPicPr>
         <p:blipFill>
-          <a:blip r:embed="rId3"/>
+          <a:blip r:embed="rId6"/>
           <a:stretch>
             <a:fillRect/>
           </a:stretch>
@@ -7985,7 +7838,7 @@
           <p:nvPr/>
         </p:nvPicPr>
         <p:blipFill>
-          <a:blip r:embed="rId4"/>
+          <a:blip r:embed="rId7"/>
           <a:stretch>
             <a:fillRect/>
           </a:stretch>
@@ -8249,7 +8102,9 @@
               <a:t>• 将人脸像素经卷积层提取特征，映射为单个年龄数值 ŷ。• 损失函数采用 L1：L = |y - ŷ|，即直接最小化 MAE（平均绝对误差）。</a:t>
             </a:r>
             <a:br/>
-            <a:endParaRPr/>
+            <a:r>
+              <a:t/>
+            </a:r>
           </a:p>
         </p:txBody>
       </p:sp>
@@ -8349,7 +8204,9 @@
               <a:t>• 输出：一个连续年龄数值（1–116 岁），并在无人脸时拒绝。• 误差特性：对 80 岁以上人群系统性低估，是当前主要误差来源。</a:t>
             </a:r>
             <a:br/>
-            <a:endParaRPr/>
+            <a:r>
+              <a:t/>
+            </a:r>
           </a:p>
         </p:txBody>
       </p:sp>
@@ -8785,7 +8642,7 @@
           <p:nvPr/>
         </p:nvPicPr>
         <p:blipFill>
-          <a:blip r:embed="rId2"/>
+          <a:blip r:embed="rId3"/>
           <a:stretch>
             <a:fillRect/>
           </a:stretch>
@@ -9049,7 +8906,9 @@
               <a:t>• 已集成 OpenCV Haar 人脸检测：大图无人脸直接拒绝（返回“未识别出人脸”）。• 修复前实测：纯色图测出 24~30 岁、噪点图测出 50 岁；修复后均被正确拦截。</a:t>
             </a:r>
             <a:br/>
-            <a:endParaRPr/>
+            <a:r>
+              <a:t/>
+            </a:r>
           </a:p>
         </p:txBody>
       </p:sp>
